--- a/nop/02-slide-mon-hoc.pptx
+++ b/nop/02-slide-mon-hoc.pptx
@@ -43733,7 +43733,12 @@
             <a:br/>
             <a:r>
               <a:rPr/>
-              <a:t>Phạm Công Thành — 25410013 · Nguyễn Minh Hiếu — 25410007</a:t>
+              <a:t>Phạm Nguyễn Thế Châu — 25410004 · Nguyễn Công Hậu — 25410006</a:t>
+            </a:r>
+            <a:br/>
+            <a:r>
+              <a:rPr/>
+              <a:t>Nguyễn Minh Hiếu — 25410007 · Phạm Công Thành — 25410013</a:t>
             </a:r>
           </a:p>
         </p:txBody>

--- a/nop/02-slide-mon-hoc.pptx
+++ b/nop/02-slide-mon-hoc.pptx
@@ -44944,15 +44944,45 @@
             </a:r>
             <a:r>
               <a:rPr/>
-              <a:t> — và một trong hai suy </a:t>
+              <a:t>, và mục </a:t>
+            </a:r>
+            <a:r>
+              <a:rPr>
+                <a:latin typeface="Courier"/>
+              </a:rPr>
+              <a:t>L → 1</a:t>
+            </a:r>
+            <a:r>
+              <a:rPr/>
+              <a:t> ở vị trí chữ số đoán </a:t>
             </a:r>
             <a:r>
               <a:rPr b="1"/>
-              <a:t>sai chiều</a:t>
+              <a:t>sai đích</a:t>
             </a:r>
             <a:r>
               <a:rPr/>
-              <a:t>. Thay bằng bảng trích từ ma trận đo được: phủ </a:t>
+              <a:t> — đo được </a:t>
+            </a:r>
+            <a:r>
+              <a:rPr>
+                <a:latin typeface="Courier"/>
+              </a:rPr>
+              <a:t>L</a:t>
+            </a:r>
+            <a:r>
+              <a:rPr/>
+              <a:t> thật ra là </a:t>
+            </a:r>
+            <a:r>
+              <a:rPr>
+                <a:latin typeface="Courier"/>
+              </a:rPr>
+              <a:t>4</a:t>
+            </a:r>
+            <a:r>
+              <a:rPr/>
+              <a:t> (53 lần). Bảng trích từ ma trận đo được: phủ </a:t>
             </a:r>
             <a:r>
               <a:rPr b="1"/>
@@ -45677,7 +45707,7 @@
                       </a:pPr>
                       <a:r>
                         <a:rPr b="1"/>
-                        <a:t>Thay bảng ánh xạ bằng bảng trích từ ma trận đo được</a:t>
+                        <a:t>Mở rộng bảng ánh xạ từ ma trận nhầm lẫn khi có thêm dữ liệu</a:t>
                       </a:r>
                     </a:p>
                   </a:txBody>
@@ -45692,7 +45722,7 @@
                       </a:pPr>
                       <a:r>
                         <a:rPr/>
-                        <a:t>Tối ưu hóa: dữ liệu đã có sẵn</a:t>
+                        <a:t>Vòng đầu đã +53 biển; 5 cặp còn lại chưa đủ bằng chứng</a:t>
                       </a:r>
                     </a:p>
                   </a:txBody>

--- a/nop/02-slide-mon-hoc.pptx
+++ b/nop/02-slide-mon-hoc.pptx
@@ -44940,49 +44940,11 @@
             <a:pPr lvl="0"/>
             <a:r>
               <a:rPr b="1"/>
-              <a:t>Bảng ánh xạ suy từ hình dạng chỉ phủ 2/10 cặp</a:t>
+              <a:t>Bảng luật suy từ hình dạng chỉ phủ 2/10 cặp nhầm phổ biến nhất</a:t>
             </a:r>
             <a:r>
               <a:rPr/>
-              <a:t>, và mục </a:t>
-            </a:r>
-            <a:r>
-              <a:rPr>
-                <a:latin typeface="Courier"/>
-              </a:rPr>
-              <a:t>L → 1</a:t>
-            </a:r>
-            <a:r>
-              <a:rPr/>
-              <a:t> ở vị trí chữ số đoán </a:t>
-            </a:r>
-            <a:r>
-              <a:rPr b="1"/>
-              <a:t>sai đích</a:t>
-            </a:r>
-            <a:r>
-              <a:rPr/>
-              <a:t> — đo được </a:t>
-            </a:r>
-            <a:r>
-              <a:rPr>
-                <a:latin typeface="Courier"/>
-              </a:rPr>
-              <a:t>L</a:t>
-            </a:r>
-            <a:r>
-              <a:rPr/>
-              <a:t> thật ra là </a:t>
-            </a:r>
-            <a:r>
-              <a:rPr>
-                <a:latin typeface="Courier"/>
-              </a:rPr>
-              <a:t>4</a:t>
-            </a:r>
-            <a:r>
-              <a:rPr/>
-              <a:t> (53 lần). Bảng trích từ ma trận đo được: phủ </a:t>
+              <a:t>; bảng trích từ ma trận đo được phủ </a:t>
             </a:r>
             <a:r>
               <a:rPr b="1"/>
@@ -44990,11 +44952,11 @@
             </a:r>
             <a:r>
               <a:rPr/>
-              <a:t>, thêm </a:t>
+              <a:t> và thêm </a:t>
             </a:r>
             <a:r>
               <a:rPr b="1"/>
-              <a:t>53 biển đúng, 0 hỏng</a:t>
+              <a:t>53 biển đúng</a:t>
             </a:r>
           </a:p>
           <a:p>
@@ -46140,15 +46102,15 @@
             <a:pPr lvl="0"/>
             <a:r>
               <a:rPr/>
-              <a:t>Chưa đạt: đọc đúng cả chuỗi </a:t>
+              <a:t>Điểm nghẽn còn lại: </a:t>
             </a:r>
             <a:r>
               <a:rPr b="1"/>
-              <a:t>0,7701</a:t>
+              <a:t>biển hai dòng</a:t>
             </a:r>
             <a:r>
               <a:rPr/>
-              <a:t> so với ngưỡng 0,85</a:t>
+              <a:t> (S₁ = 0,7234)</a:t>
             </a:r>
           </a:p>
           <a:p>

--- a/nop/02-slide-mon-hoc.pptx
+++ b/nop/02-slide-mon-hoc.pptx
@@ -49507,7 +49507,7 @@
             </a:r>
             <a:r>
               <a:rPr/>
-              <a:t> — riêng biển một dòng đạt 0,9541</a:t>
+              <a:t> — riêng một dòng đạt 0,9541 sau hậu xử lý</a:t>
             </a:r>
           </a:p>
         </p:txBody>

--- a/nop/02-slide-mon-hoc.pptx
+++ b/nop/02-slide-mon-hoc.pptx
@@ -45270,8 +45270,8 @@
         </p:blipFill>
         <p:spPr bwMode="auto">
           <a:xfrm>
-            <a:off x="2971800" y="2324100"/>
-            <a:ext cx="6159500" cy="3848100"/>
+            <a:off x="1981200" y="2324100"/>
+            <a:ext cx="8153400" cy="3848100"/>
           </a:xfrm>
           <a:prstGeom prst="rect">
             <a:avLst/>

--- a/nop/02-slide-mon-hoc.pptx
+++ b/nop/02-slide-mon-hoc.pptx
@@ -45684,7 +45684,7 @@
                       </a:pPr>
                       <a:r>
                         <a:rPr/>
-                        <a:t>Vòng đầu đã +53 biển; 5 cặp còn lại chưa đủ bằng chứng</a:t>
+                        <a:t>Vòng đầu đã +53 biển, phủ 4/10; 6 cặp còn lại nằm ngoài cơ chế mặt nạ vị trí</a:t>
                       </a:r>
                     </a:p>
                   </a:txBody>
@@ -46053,7 +46053,7 @@
             </a:r>
             <a:r>
               <a:rPr b="1"/>
-              <a:t>mAP@0.5 = 0,9829</a:t>
+              <a:t>mAP@0,5 = 0,9829</a:t>
             </a:r>
           </a:p>
           <a:p>
@@ -46809,7 +46809,7 @@
                       </a:pPr>
                       <a:r>
                         <a:rPr/>
-                        <a:t>mAP@0.5 của bộ phát hiện</a:t>
+                        <a:t>mAP@0,5 của bộ phát hiện</a:t>
                       </a:r>
                     </a:p>
                   </a:txBody>

--- a/nop/02-slide-mon-hoc.pptx
+++ b/nop/02-slide-mon-hoc.pptx
@@ -44319,7 +44319,7 @@
             <p:ph idx="1"/>
             <p:extLst>
               <p:ext uri="{D42A27DB-BD31-4B8C-83A1-F6EECF244321}">
-                <p14:modId xmlns:p14="http://schemas.microsoft.com/office/powerpoint/2010/main" val="2575042147"/>
+                <p14:modId xmlns:p14="http://schemas.microsoft.com/office/powerpoint/2010/main" val="4240079268"/>
               </p:ext>
             </p:extLst>
           </p:nvPr>
@@ -44988,8 +44988,8 @@
         </p:blipFill>
         <p:spPr bwMode="auto">
           <a:xfrm>
-            <a:off x="1778000" y="2324100"/>
-            <a:ext cx="8547100" cy="3848100"/>
+            <a:off x="1854200" y="2324100"/>
+            <a:ext cx="8394700" cy="3848100"/>
           </a:xfrm>
           <a:prstGeom prst="rect">
             <a:avLst/>
@@ -46173,7 +46173,7 @@
             </a:r>
             <a:r>
               <a:rPr b="1"/>
-              <a:t>cả ba ca sai đều hỏng ở dòng trên</a:t>
+              <a:t>cả ba ca sai đều gặp lỗi ở dòng trên</a:t>
             </a:r>
             <a:r>
               <a:t>.</a:t>
@@ -48055,7 +48055,7 @@
             <p:ph idx="1"/>
             <p:extLst>
               <p:ext uri="{D42A27DB-BD31-4B8C-83A1-F6EECF244321}">
-                <p14:modId xmlns:p14="http://schemas.microsoft.com/office/powerpoint/2010/main" val="1966600073"/>
+                <p14:modId xmlns:p14="http://schemas.microsoft.com/office/powerpoint/2010/main" val="2669706308"/>
               </p:ext>
             </p:extLst>
           </p:nvPr>
